--- a/dist/초5/국어/토의와논리적표현/초5_국어_토의와논리적표현_03_주장하는글쓰기_학생용.pptx
+++ b/dist/초5/국어/토의와논리적표현/초5_국어_토의와논리적표현_03_주장하는글쓰기_학생용.pptx
@@ -120,13 +120,13 @@
   <p:extLst>
     <p:ext uri="{521415D9-36F7-43E2-AB2F-B90AF26B5E84}">
       <p14:sectionLst xmlns:p14="http://schemas.microsoft.com/office/powerpoint/2010/main">
-        <p14:section name="도입" id="{f76d4eb7-476c-1ba2-0617-e1c21ce1ec2c}">
+        <p14:section name="도입" id="{6728c4cf-440c-49cf-07db-202d1b6f2815}">
           <p14:sldIdLst>
             <p14:sldId id="256"/>
             <p14:sldId id="257"/>
           </p14:sldIdLst>
         </p14:section>
-        <p14:section name="개념" id="{55c77ac8-6879-ee26-5e68-1f919cc183a4}">
+        <p14:section name="개념" id="{543a32ea-7753-852f-d794-313ef911c4df}">
           <p14:sldIdLst>
             <p14:sldId id="258"/>
             <p14:sldId id="259"/>
@@ -135,25 +135,25 @@
             <p14:sldId id="262"/>
           </p14:sldIdLst>
         </p14:section>
-        <p14:section name="연습" id="{7c27f5b0-958c-986b-673b-787c8681d867}">
+        <p14:section name="연습" id="{0afee388-51b1-5652-7510-a3e35430466a}">
           <p14:sldIdLst>
             <p14:sldId id="263"/>
             <p14:sldId id="264"/>
             <p14:sldId id="265"/>
           </p14:sldIdLst>
         </p14:section>
-        <p14:section name="확인" id="{7ffadd2f-9f42-85b3-ddd0-eafc09206181}">
+        <p14:section name="확인" id="{df5369f2-f91f-2ea7-f107-27ed5b0b8c7b}">
           <p14:sldIdLst>
             <p14:sldId id="266"/>
             <p14:sldId id="267"/>
           </p14:sldIdLst>
         </p14:section>
-        <p14:section name="정리" id="{46887848-9d69-b57e-5b13-99911bf31f2f}">
+        <p14:section name="정리" id="{8c256919-3aa8-a783-ad49-11b7d2066dd7}">
           <p14:sldIdLst>
             <p14:sldId id="268"/>
           </p14:sldIdLst>
         </p14:section>
-        <p14:section name="보충" id="{2c0f0fc0-2b84-7688-1662-e1e8d359c0ea}">
+        <p14:section name="보충" id="{0624b503-9244-9ac1-9ca4-ef98491e3e02}">
           <p14:sldIdLst>
             <p14:sldId id="269"/>
           </p14:sldIdLst>
@@ -7403,7 +7403,7 @@
           </p:nvPr>
         </p:nvGraphicFramePr>
         <p:xfrm>
-          <a:off x="836676" y="2148840"/>
+          <a:off x="836676" y="2121408"/>
           <a:ext cx="10515600" cy="914400"/>
         </p:xfrm>
         <a:graphic>
@@ -7415,7 +7415,7 @@
                 <a:gridCol w="2313432"/>
                 <a:gridCol w="6729984"/>
               </a:tblGrid>
-              <a:tr h="472440">
+              <a:tr h="481584">
                 <a:tc>
                   <a:txBody>
                     <a:bodyPr/>
@@ -7621,7 +7621,7 @@
                   </a:tcPr>
                 </a:tc>
               </a:tr>
-              <a:tr h="472440">
+              <a:tr h="481584">
                 <a:tc>
                   <a:txBody>
                     <a:bodyPr/>
@@ -7827,7 +7827,7 @@
                   </a:tcPr>
                 </a:tc>
               </a:tr>
-              <a:tr h="472440">
+              <a:tr h="481584">
                 <a:tc>
                   <a:txBody>
                     <a:bodyPr/>
@@ -8033,7 +8033,7 @@
                   </a:tcPr>
                 </a:tc>
               </a:tr>
-              <a:tr h="472440">
+              <a:tr h="481584">
                 <a:tc>
                   <a:txBody>
                     <a:bodyPr/>
@@ -8239,7 +8239,7 @@
                   </a:tcPr>
                 </a:tc>
               </a:tr>
-              <a:tr h="472440">
+              <a:tr h="481584">
                 <a:tc>
                   <a:txBody>
                     <a:bodyPr/>
@@ -8445,7 +8445,7 @@
                   </a:tcPr>
                 </a:tc>
               </a:tr>
-              <a:tr h="472440">
+              <a:tr h="481584">
                 <a:tc>
                   <a:txBody>
                     <a:bodyPr/>
